--- a/P11_Review2_Implementation_and_Results.pptx
+++ b/P11_Review2_Implementation_and_Results.pptx
@@ -121,14 +121,14 @@
   <p:extLst>
     <p:ext uri="{521415D9-36F7-43E2-AB2F-B90AF26B5E84}">
       <p14:sectionLst xmlns:p14="http://schemas.microsoft.com/office/powerpoint/2010/main">
-        <p14:section name="Introduction" id="{4b9d8c09-d073-a9cc-99b4-c36f3ffe8834}">
+        <p14:section name="Introduction" id="{6ea38c67-1293-a5f0-0b2a-19fece2a3aa6}">
           <p14:sldIdLst>
             <p14:sldId id="256"/>
             <p14:sldId id="257"/>
             <p14:sldId id="258"/>
           </p14:sldIdLst>
         </p14:section>
-        <p14:section name="Implementation" id="{bf0b0279-03d3-d6e8-c1d2-3f7fb88572c8}">
+        <p14:section name="Implementation" id="{c56d0cfd-916b-fbeb-31da-14dac3958503}">
           <p14:sldIdLst>
             <p14:sldId id="259"/>
             <p14:sldId id="260"/>
@@ -136,21 +136,21 @@
             <p14:sldId id="262"/>
           </p14:sldIdLst>
         </p14:section>
-        <p14:section name="Results" id="{879626c6-1e91-dd65-04bb-8a8bf1bc77f6}">
+        <p14:section name="Results" id="{9397e307-eefb-1f78-1b44-caefa3dbb2e7}">
           <p14:sldIdLst>
             <p14:sldId id="263"/>
             <p14:sldId id="264"/>
             <p14:sldId id="265"/>
           </p14:sldIdLst>
         </p14:section>
-        <p14:section name="Analysis" id="{bbea675e-20e2-fffc-6d3d-188149e93182}">
+        <p14:section name="Analysis" id="{374f625c-ed86-f29e-c1be-0bf804003db2}">
           <p14:sldIdLst>
             <p14:sldId id="266"/>
             <p14:sldId id="267"/>
             <p14:sldId id="268"/>
           </p14:sldIdLst>
         </p14:section>
-        <p14:section name="Next steps" id="{6a3cf362-488b-3ddc-9953-bfca090f8238}">
+        <p14:section name="Next steps" id="{ae163d9d-3b17-dc28-f8ec-e7aa32963d2e}">
           <p14:sldIdLst>
             <p14:sldId id="269"/>
             <p14:sldId id="270"/>
@@ -13040,7 +13040,7 @@
                   <a:srgbClr val="4C6A92"/>
                 </a:solidFill>
               </a:rPr>
-              <a:t>Python controller on the official Kubernetes client, running in-cluster on k3s</a:t>
+              <a:t>Python controller on the official Kubernetes client, running on the k3s server</a:t>
             </a:r>
             <a:endParaRPr lang="en-US" sz="1600" dirty="0"/>
           </a:p>
@@ -13106,7 +13106,7 @@
                 <a:ea typeface="Courier New" pitchFamily="34" charset="-122"/>
                 <a:cs typeface="Courier New" pitchFamily="34" charset="-120"/>
               </a:rPr>
-              <a:t>p11-cloud-bursting/</a:t>
+              <a:t>cloud-burst/</a:t>
             </a:r>
             <a:endParaRPr lang="en-US" sz="1300" dirty="0"/>
           </a:p>
@@ -13123,7 +13123,7 @@
                 <a:ea typeface="Courier New" pitchFamily="34" charset="-122"/>
                 <a:cs typeface="Courier New" pitchFamily="34" charset="-120"/>
               </a:rPr>
-              <a:t>├── controller/</a:t>
+              <a:t>├── policyburst/</a:t>
             </a:r>
             <a:endParaRPr lang="en-US" sz="1300" dirty="0"/>
           </a:p>
@@ -13157,7 +13157,7 @@
                 <a:ea typeface="Courier New" pitchFamily="34" charset="-122"/>
                 <a:cs typeface="Courier New" pitchFamily="34" charset="-120"/>
               </a:rPr>
-              <a:t>│   ├── policy.py        # BurstPolicy CRD watcher</a:t>
+              <a:t>│   ├── policy.py        # BurstPolicy model</a:t>
             </a:r>
             <a:endParaRPr lang="en-US" sz="1300" dirty="0"/>
           </a:p>
@@ -13208,7 +13208,7 @@
                 <a:ea typeface="Courier New" pitchFamily="34" charset="-122"/>
                 <a:cs typeface="Courier New" pitchFamily="34" charset="-120"/>
               </a:rPr>
-              <a:t>│   └── actuator.py      # uncordon/drain, node affinity</a:t>
+              <a:t>│   ├── decision.py      # when / how much / which work</a:t>
             </a:r>
             <a:endParaRPr lang="en-US" sz="1300" dirty="0"/>
           </a:p>
@@ -13225,7 +13225,7 @@
                 <a:ea typeface="Courier New" pitchFamily="34" charset="-122"/>
                 <a:cs typeface="Courier New" pitchFamily="34" charset="-120"/>
               </a:rPr>
-              <a:t>├── baselines/threshold.py   # B1 (constraints off)</a:t>
+              <a:t>│   └── actuator.py      # cordon, node affinity</a:t>
             </a:r>
             <a:endParaRPr lang="en-US" sz="1300" dirty="0"/>
           </a:p>
@@ -13242,7 +13242,7 @@
                 <a:ea typeface="Courier New" pitchFamily="34" charset="-122"/>
                 <a:cs typeface="Courier New" pitchFamily="34" charset="-120"/>
               </a:rPr>
-              <a:t>├── deploy/              # CRD, RBAC, sample app, Prometheus</a:t>
+              <a:t>├── baselines/threshold.py   # B1 (constraints off)</a:t>
             </a:r>
             <a:endParaRPr lang="en-US" sz="1300" dirty="0"/>
           </a:p>
@@ -13259,7 +13259,7 @@
                 <a:ea typeface="Courier New" pitchFamily="34" charset="-122"/>
                 <a:cs typeface="Courier New" pitchFamily="34" charset="-120"/>
               </a:rPr>
-              <a:t>├── load/locustfile.py   # burst LoadTestShape</a:t>
+              <a:t>├── deploy/              # k3s, CRD, policies, sample app</a:t>
             </a:r>
             <a:endParaRPr lang="en-US" sz="1300" dirty="0"/>
           </a:p>
@@ -13276,7 +13276,7 @@
                 <a:ea typeface="Courier New" pitchFamily="34" charset="-122"/>
                 <a:cs typeface="Courier New" pitchFamily="34" charset="-120"/>
               </a:rPr>
-              <a:t>├── experiments/run_matrix.py</a:t>
+              <a:t>├── load/locustfile.py   # burst + ramp shapes</a:t>
             </a:r>
             <a:endParaRPr lang="en-US" sz="1300" dirty="0"/>
           </a:p>
@@ -13293,7 +13293,41 @@
                 <a:ea typeface="Courier New" pitchFamily="34" charset="-122"/>
                 <a:cs typeface="Courier New" pitchFamily="34" charset="-120"/>
               </a:rPr>
-              <a:t>└── analysis/plots.ipynb</a:t>
+              <a:t>├── experiments/run_matrix.py</a:t>
+            </a:r>
+            <a:endParaRPr lang="en-US" sz="1300" dirty="0"/>
+          </a:p>
+          <a:p>
+            <a:pPr indent="0" marL="0">
+              <a:buNone/>
+            </a:pPr>
+            <a:r>
+              <a:rPr lang="en-US" sz="1300" dirty="0">
+                <a:solidFill>
+                  <a:srgbClr val="E6EDF3"/>
+                </a:solidFill>
+                <a:latin typeface="Courier New" pitchFamily="34" charset="0"/>
+                <a:ea typeface="Courier New" pitchFamily="34" charset="-122"/>
+                <a:cs typeface="Courier New" pitchFamily="34" charset="-120"/>
+              </a:rPr>
+              <a:t>├── analysis/            # metrics.py, plots.py</a:t>
+            </a:r>
+            <a:endParaRPr lang="en-US" sz="1300" dirty="0"/>
+          </a:p>
+          <a:p>
+            <a:pPr indent="0" marL="0">
+              <a:buNone/>
+            </a:pPr>
+            <a:r>
+              <a:rPr lang="en-US" sz="1300" dirty="0">
+                <a:solidFill>
+                  <a:srgbClr val="E6EDF3"/>
+                </a:solidFill>
+                <a:latin typeface="Courier New" pitchFamily="34" charset="0"/>
+                <a:ea typeface="Courier New" pitchFamily="34" charset="-122"/>
+                <a:cs typeface="Courier New" pitchFamily="34" charset="-120"/>
+              </a:rPr>
+              <a:t>└── tests/               # 25 unit tests, no cluster</a:t>
             </a:r>
             <a:endParaRPr lang="en-US" sz="1300" dirty="0"/>
           </a:p>
@@ -13493,7 +13527,7 @@
                   <a:srgbClr val="1B2430"/>
                 </a:solidFill>
               </a:rPr>
-              <a:t>github.com/&lt;team&gt;/p11-cloud-bursting</a:t>
+              <a:t>github.com/AviatorRoyal/cloud-burst</a:t>
             </a:r>
             <a:endParaRPr lang="en-US" sz="1400" dirty="0"/>
           </a:p>
